--- a/classes/parte-6-analisis-de-malware/148-analisis-de-comportamiento/clase-148-presentacion.pptx
+++ b/classes/parte-6-analisis-de-malware/148-analisis-de-comportamiento/clase-148-presentacion.pptx
@@ -3317,6 +3317,21 @@
               <a:t>•  Justifica por qué los TTPs son más duraderos que los IOCs.</a:t>
             </a:r>
           </a:p>
+          <a:p>
+            <a:pPr>
+              <a:spcAft>
+                <a:spcPts val="600"/>
+              </a:spcAft>
+            </a:pPr>
+            <a:r>
+              <a:rPr sz="1500">
+                <a:solidFill>
+                  <a:srgbClr val="22282E"/>
+                </a:solidFill>
+              </a:rPr>
+              <a:t>•  Explica qué evidencia adicional necesitas para pasar de «el proceso sustituyó un valor» a «esa sustitución causó una transferencia».</a:t>
+            </a:r>
+          </a:p>
         </p:txBody>
       </p:sp>
     </p:spTree>
@@ -3570,6 +3585,36 @@
               <a:t>•  IDs de ATT&amp;CK inventados — Verifica cada técnica en attack.mitre.org</a:t>
             </a:r>
           </a:p>
+          <a:p>
+            <a:pPr>
+              <a:spcAft>
+                <a:spcPts val="600"/>
+              </a:spcAft>
+            </a:pPr>
+            <a:r>
+              <a:rPr sz="1500">
+                <a:solidFill>
+                  <a:srgbClr val="22282E"/>
+                </a:solidFill>
+              </a:rPr>
+              <a:t>•  Llamar drainer a cualquier clipper — El clipper modifica un dato del endpoint; un drainer adquiere capacidad de gasto por firma, permiso o secreto</a:t>
+            </a:r>
+          </a:p>
+          <a:p>
+            <a:pPr>
+              <a:spcAft>
+                <a:spcPts val="600"/>
+              </a:spcAft>
+            </a:pPr>
+            <a:r>
+              <a:rPr sz="1500">
+                <a:solidFill>
+                  <a:srgbClr val="22282E"/>
+                </a:solidFill>
+              </a:rPr>
+              <a:t>•  Inferir robo desde acceso al clipboard — Correlaciona sustitución, confirmación y efecto; T1115 por sí sola describe colección</a:t>
+            </a:r>
+          </a:p>
         </p:txBody>
       </p:sp>
     </p:spTree>
@@ -3689,6 +3734,51 @@
               <a:t>•  ❓ ¿Cuántos ASEPs de persistencia existen? Decenas. Autoruns cataloga muchos; por eso no basta con revisar las Run keys.</a:t>
             </a:r>
           </a:p>
+          <a:p>
+            <a:pPr>
+              <a:spcAft>
+                <a:spcPts val="600"/>
+              </a:spcAft>
+            </a:pPr>
+            <a:r>
+              <a:rPr sz="1500">
+                <a:solidFill>
+                  <a:srgbClr val="22282E"/>
+                </a:solidFill>
+              </a:rPr>
+              <a:t>•  ❓ ¿T1115 cubre todo ataque de portapapeles? Describe la colección de datos del portapapeles y</a:t>
+            </a:r>
+          </a:p>
+          <a:p>
+            <a:pPr>
+              <a:spcAft>
+                <a:spcPts val="600"/>
+              </a:spcAft>
+            </a:pPr>
+            <a:r>
+              <a:rPr sz="1500">
+                <a:solidFill>
+                  <a:srgbClr val="22282E"/>
+                </a:solidFill>
+              </a:rPr>
+              <a:t>•  ATT&amp;CK también reconoce que un adversario puede monitorizar y reemplazar contenido. Para el reporte,</a:t>
+            </a:r>
+          </a:p>
+          <a:p>
+            <a:pPr>
+              <a:spcAft>
+                <a:spcPts val="600"/>
+              </a:spcAft>
+            </a:pPr>
+            <a:r>
+              <a:rPr sz="1500">
+                <a:solidFill>
+                  <a:srgbClr val="22282E"/>
+                </a:solidFill>
+              </a:rPr>
+              <a:t>•  documenta por separado lectura, escritura y efecto; el ID no sustituye la evidencia del caso.</a:t>
+            </a:r>
+          </a:p>
         </p:txBody>
       </p:sp>
     </p:spTree>
@@ -3806,6 +3896,21 @@
                 </a:solidFill>
               </a:rPr>
               <a:t>•  MITRE ATT&amp;CK. &lt;https://attack.mitre.org&gt;</a:t>
+            </a:r>
+          </a:p>
+          <a:p>
+            <a:pPr>
+              <a:spcAft>
+                <a:spcPts val="600"/>
+              </a:spcAft>
+            </a:pPr>
+            <a:r>
+              <a:rPr sz="1500">
+                <a:solidFill>
+                  <a:srgbClr val="22282E"/>
+                </a:solidFill>
+              </a:rPr>
+              <a:t>•  MITRE ATT&amp;CK — Clipboard Data (T1115): acceso y ejemplos de monitorización/sustitución; no demuestra por sí solo una transferencia. &lt;https://attack.mitre.org/techniques/T1115/&gt;</a:t>
             </a:r>
           </a:p>
           <a:p>
@@ -3999,7 +4104,52 @@
                   <a:srgbClr val="22282E"/>
                 </a:solidFill>
               </a:rPr>
-              <a:t>•  Reconstruir el comportamiento completo de una muestra y mapearlo a MITRE ATT&amp;CK: persistencia, escalada, evasión de defensas, inyección de código, movimiento y exfiltración. Se integran análisis…</a:t>
+              <a:t>•  Reconstruir el comportamiento completo de una muestra y mapearlo a MITRE ATT&amp;CK: persistencia,</a:t>
+            </a:r>
+          </a:p>
+          <a:p>
+            <a:pPr>
+              <a:spcAft>
+                <a:spcPts val="600"/>
+              </a:spcAft>
+            </a:pPr>
+            <a:r>
+              <a:rPr sz="1500">
+                <a:solidFill>
+                  <a:srgbClr val="22282E"/>
+                </a:solidFill>
+              </a:rPr>
+              <a:t>•  escalada, evasión de defensas, inyección, colección, manipulación y exfiltración. Se integran análisis</a:t>
+            </a:r>
+          </a:p>
+          <a:p>
+            <a:pPr>
+              <a:spcAft>
+                <a:spcPts val="600"/>
+              </a:spcAft>
+            </a:pPr>
+            <a:r>
+              <a:rPr sz="1500">
+                <a:solidFill>
+                  <a:srgbClr val="22282E"/>
+                </a:solidFill>
+              </a:rPr>
+              <a:t>•  dinámico, forense de memoria y desensamblado para pasar de "hace cosas" a un relato estructurado de</a:t>
+            </a:r>
+          </a:p>
+          <a:p>
+            <a:pPr>
+              <a:spcAft>
+                <a:spcPts val="600"/>
+              </a:spcAft>
+            </a:pPr>
+            <a:r>
+              <a:rPr sz="1500">
+                <a:solidFill>
+                  <a:srgbClr val="22282E"/>
+                </a:solidFill>
+              </a:rPr>
+              <a:t>•  TTPs que alimenta detección y respuesta.</a:t>
             </a:r>
           </a:p>
         </p:txBody>
@@ -4166,6 +4316,21 @@
               <a:t>•  Producir una matriz de comportamiento reutilizable en detección.</a:t>
             </a:r>
           </a:p>
+          <a:p>
+            <a:pPr>
+              <a:spcAft>
+                <a:spcPts val="600"/>
+              </a:spcAft>
+            </a:pPr>
+            <a:r>
+              <a:rPr sz="1500">
+                <a:solidFill>
+                  <a:srgbClr val="22282E"/>
+                </a:solidFill>
+              </a:rPr>
+              <a:t>•  Distinguir acceso al portapapeles, sustitución de su contenido y efecto posterior mediante evidencia correlacionada.</a:t>
+            </a:r>
+          </a:p>
         </p:txBody>
       </p:sp>
     </p:spTree>
@@ -4671,6 +4836,21 @@
                 </a:solidFill>
               </a:rPr>
               <a:t>•  TTP: táctica, técnica y procedimiento. Característica clave: abstracción estable frente a IOCs volátiles.</a:t>
+            </a:r>
+          </a:p>
+          <a:p>
+            <a:pPr>
+              <a:spcAft>
+                <a:spcPts val="600"/>
+              </a:spcAft>
+            </a:pPr>
+            <a:r>
+              <a:rPr sz="1500">
+                <a:solidFill>
+                  <a:srgbClr val="22282E"/>
+                </a:solidFill>
+              </a:rPr>
+              <a:t>•  Clipboard stealer / clipper: malware que lee o sustituye el portapapeles. Característica clave: abuso de una función legítima del SO.</a:t>
             </a:r>
           </a:p>
         </p:txBody>
